--- a/docs/presentation_he/מצגת.pptx
+++ b/docs/presentation_he/מצגת.pptx
@@ -517,7 +517,7 @@
                 <c:formatCode>General</c:formatCode>
                 <c:ptCount val="1"/>
                 <c:pt idx="0">
-                  <c:v>0.338</c:v>
+                  <c:v>0.346</c:v>
                 </c:pt>
               </c:numCache>
             </c:numRef>
@@ -588,7 +588,7 @@
                 <c:formatCode>General</c:formatCode>
                 <c:ptCount val="1"/>
                 <c:pt idx="0">
-                  <c:v>0.325</c:v>
+                  <c:v>0.322</c:v>
                 </c:pt>
               </c:numCache>
             </c:numRef>
@@ -5835,7 +5835,7 @@
                 <a:ea typeface="Segoe UI" pitchFamily="34" charset="-122"/>
                 <a:cs typeface="Segoe UI" pitchFamily="34" charset="-120"/>
               </a:rPr>
-              <a:t>Purity@5: 0.351   ·   Precision@5: 0.755   ·   MRR: 0.865</a:t>
+              <a:t>Purity@5: 0.352   ·   Precision@5: 0.758   ·   MRR: 0.876</a:t>
             </a:r>
             <a:endParaRPr lang="en-US" sz="1300" dirty="0"/>
           </a:p>
@@ -6451,8 +6451,8 @@
         </p:nvSpPr>
         <p:spPr>
           <a:xfrm>
-            <a:off x="731520" y="1920240"/>
-            <a:ext cx="3108960" cy="548640"/>
+            <a:off x="731520" y="1783080"/>
+            <a:ext cx="2377440" cy="365760"/>
           </a:xfrm>
           <a:prstGeom prst="rect">
             <a:avLst/>
@@ -6468,7 +6468,7 @@
               <a:buNone/>
             </a:pPr>
             <a:r>
-              <a:rPr lang="en-US" sz="1800" b="1" dirty="0">
+              <a:rPr lang="en-US" sz="1600" b="1" dirty="0">
                 <a:solidFill>
                   <a:srgbClr val="6FD7B3"/>
                 </a:solidFill>
@@ -6478,7 +6478,7 @@
               </a:rPr>
               <a:t>GET /compare</a:t>
             </a:r>
-            <a:endParaRPr lang="en-US" sz="1800" dirty="0"/>
+            <a:endParaRPr lang="en-US" sz="1600" dirty="0"/>
           </a:p>
         </p:txBody>
       </p:sp>
@@ -6490,8 +6490,8 @@
         </p:nvSpPr>
         <p:spPr>
           <a:xfrm>
-            <a:off x="4023360" y="1920240"/>
-            <a:ext cx="7406640" cy="548640"/>
+            <a:off x="3200400" y="1783080"/>
+            <a:ext cx="8229600" cy="365760"/>
           </a:xfrm>
           <a:prstGeom prst="rect">
             <a:avLst/>
@@ -6507,30 +6507,69 @@
               <a:buNone/>
             </a:pPr>
             <a:r>
-              <a:rPr lang="en-US" sz="1500" dirty="0">
-                <a:solidFill>
-                  <a:srgbClr val="C9D3D0"/>
+              <a:rPr lang="en-US" sz="1250" dirty="0">
+                <a:solidFill>
+                  <a:srgbClr val="E7E9EE"/>
+                </a:solidFill>
+                <a:latin typeface="Cascadia Code" pitchFamily="34" charset="0"/>
+                <a:ea typeface="Cascadia Code" pitchFamily="34" charset="-122"/>
+                <a:cs typeface="Cascadia Code" pitchFamily="34" charset="-120"/>
+              </a:rPr>
+              <a:t>q: "security incident"</a:t>
+            </a:r>
+            <a:endParaRPr lang="en-US" sz="1250" dirty="0"/>
+          </a:p>
+        </p:txBody>
+      </p:sp>
+      <p:sp>
+        <p:nvSpPr>
+          <p:cNvPr id="6" name="Text 4"/>
+          <p:cNvSpPr/>
+          <p:nvPr/>
+        </p:nvSpPr>
+        <p:spPr>
+          <a:xfrm>
+            <a:off x="731520" y="2167128"/>
+            <a:ext cx="10698480" cy="457200"/>
+          </a:xfrm>
+          <a:prstGeom prst="rect">
+            <a:avLst/>
+          </a:prstGeom>
+          <a:noFill/>
+          <a:ln/>
+        </p:spPr>
+        <p:txBody>
+          <a:bodyPr wrap="square" rtlCol="0" anchor="t"/>
+          <a:lstStyle/>
+          <a:p>
+            <a:pPr algn="r" indent="0" marL="0">
+              <a:buNone/>
+            </a:pPr>
+            <a:r>
+              <a:rPr lang="en-US" sz="1300" dirty="0">
+                <a:solidFill>
+                  <a:srgbClr val="9AA3B5"/>
                 </a:solidFill>
                 <a:latin typeface="Segoe UI" pitchFamily="34" charset="0"/>
                 <a:ea typeface="Segoe UI" pitchFamily="34" charset="-122"/>
                 <a:cs typeface="Segoe UI" pitchFamily="34" charset="-120"/>
               </a:rPr>
-              <a:t>אותה שאילתה, שלושה מצבי חיפוש בו-זמנית — ההבדל בין מילולי לסמנטי על מסך אחד</a:t>
-            </a:r>
-            <a:endParaRPr lang="en-US" sz="1500" dirty="0"/>
-          </a:p>
-        </p:txBody>
-      </p:sp>
-      <p:sp>
-        <p:nvSpPr>
-          <p:cNvPr id="6" name="Text 4"/>
-          <p:cNvSpPr/>
-          <p:nvPr/>
-        </p:nvSpPr>
-        <p:spPr>
-          <a:xfrm>
-            <a:off x="731520" y="2834640"/>
-            <a:ext cx="3108960" cy="548640"/>
+              <a:t>מילולי מעלה כרטיס גרמני שגוי (מילה נדמתה) · סמנטי מוצא את הנכון בלי אף מילה משותפת</a:t>
+            </a:r>
+            <a:endParaRPr lang="en-US" sz="1300" dirty="0"/>
+          </a:p>
+        </p:txBody>
+      </p:sp>
+      <p:sp>
+        <p:nvSpPr>
+          <p:cNvPr id="7" name="Text 5"/>
+          <p:cNvSpPr/>
+          <p:nvPr/>
+        </p:nvSpPr>
+        <p:spPr>
+          <a:xfrm>
+            <a:off x="731520" y="3017520"/>
+            <a:ext cx="2377440" cy="365760"/>
           </a:xfrm>
           <a:prstGeom prst="rect">
             <a:avLst/>
@@ -6546,7 +6585,7 @@
               <a:buNone/>
             </a:pPr>
             <a:r>
-              <a:rPr lang="en-US" sz="1800" b="1" dirty="0">
+              <a:rPr lang="en-US" sz="1600" b="1" dirty="0">
                 <a:solidFill>
                   <a:srgbClr val="6FD7B3"/>
                 </a:solidFill>
@@ -6556,20 +6595,20 @@
               </a:rPr>
               <a:t>POST /route</a:t>
             </a:r>
-            <a:endParaRPr lang="en-US" sz="1800" dirty="0"/>
-          </a:p>
-        </p:txBody>
-      </p:sp>
-      <p:sp>
-        <p:nvSpPr>
-          <p:cNvPr id="7" name="Text 5"/>
-          <p:cNvSpPr/>
-          <p:nvPr/>
-        </p:nvSpPr>
-        <p:spPr>
-          <a:xfrm>
-            <a:off x="4023360" y="2834640"/>
-            <a:ext cx="7406640" cy="548640"/>
+            <a:endParaRPr lang="en-US" sz="1600" dirty="0"/>
+          </a:p>
+        </p:txBody>
+      </p:sp>
+      <p:sp>
+        <p:nvSpPr>
+          <p:cNvPr id="8" name="Text 6"/>
+          <p:cNvSpPr/>
+          <p:nvPr/>
+        </p:nvSpPr>
+        <p:spPr>
+          <a:xfrm>
+            <a:off x="3200400" y="3017520"/>
+            <a:ext cx="8229600" cy="365760"/>
           </a:xfrm>
           <a:prstGeom prst="rect">
             <a:avLst/>
@@ -6585,30 +6624,69 @@
               <a:buNone/>
             </a:pPr>
             <a:r>
-              <a:rPr lang="en-US" sz="1500" dirty="0">
-                <a:solidFill>
-                  <a:srgbClr val="C9D3D0"/>
+              <a:rPr lang="en-US" sz="1250" dirty="0">
+                <a:solidFill>
+                  <a:srgbClr val="E7E9EE"/>
+                </a:solidFill>
+                <a:latin typeface="Cascadia Code" pitchFamily="34" charset="0"/>
+                <a:ea typeface="Cascadia Code" pitchFamily="34" charset="-122"/>
+                <a:cs typeface="Cascadia Code" pitchFamily="34" charset="-120"/>
+              </a:rPr>
+              <a:t>טקסט: "...charged twice for the same order...need a refund"</a:t>
+            </a:r>
+            <a:endParaRPr lang="en-US" sz="1250" dirty="0"/>
+          </a:p>
+        </p:txBody>
+      </p:sp>
+      <p:sp>
+        <p:nvSpPr>
+          <p:cNvPr id="9" name="Text 7"/>
+          <p:cNvSpPr/>
+          <p:nvPr/>
+        </p:nvSpPr>
+        <p:spPr>
+          <a:xfrm>
+            <a:off x="731520" y="3401568"/>
+            <a:ext cx="10698480" cy="457200"/>
+          </a:xfrm>
+          <a:prstGeom prst="rect">
+            <a:avLst/>
+          </a:prstGeom>
+          <a:noFill/>
+          <a:ln/>
+        </p:spPr>
+        <p:txBody>
+          <a:bodyPr wrap="square" rtlCol="0" anchor="t"/>
+          <a:lstStyle/>
+          <a:p>
+            <a:pPr algn="r" indent="0" marL="0">
+              <a:buNone/>
+            </a:pPr>
+            <a:r>
+              <a:rPr lang="en-US" sz="1300" dirty="0">
+                <a:solidFill>
+                  <a:srgbClr val="9AA3B5"/>
                 </a:solidFill>
                 <a:latin typeface="Segoe UI" pitchFamily="34" charset="0"/>
                 <a:ea typeface="Segoe UI" pitchFamily="34" charset="-122"/>
                 <a:cs typeface="Segoe UI" pitchFamily="34" charset="-120"/>
               </a:rPr>
-              <a:t>ניתוב כרטיס חדש שלא נראה קודם, בזמן אמת</a:t>
-            </a:r>
-            <a:endParaRPr lang="en-US" sz="1500" dirty="0"/>
-          </a:p>
-        </p:txBody>
-      </p:sp>
-      <p:sp>
-        <p:nvSpPr>
-          <p:cNvPr id="8" name="Text 6"/>
-          <p:cNvSpPr/>
-          <p:nvPr/>
-        </p:nvSpPr>
-        <p:spPr>
-          <a:xfrm>
-            <a:off x="731520" y="3749040"/>
-            <a:ext cx="3108960" cy="548640"/>
+              <a:t>k-NN: Technical Support · confidence 33% (5 מתוך 15 קולות — לא ניחוש בטוח, וזה נתון שימושי בפני עצמו)</a:t>
+            </a:r>
+            <a:endParaRPr lang="en-US" sz="1300" dirty="0"/>
+          </a:p>
+        </p:txBody>
+      </p:sp>
+      <p:sp>
+        <p:nvSpPr>
+          <p:cNvPr id="10" name="Text 8"/>
+          <p:cNvSpPr/>
+          <p:nvPr/>
+        </p:nvSpPr>
+        <p:spPr>
+          <a:xfrm>
+            <a:off x="731520" y="4251960"/>
+            <a:ext cx="2377440" cy="365760"/>
           </a:xfrm>
           <a:prstGeom prst="rect">
             <a:avLst/>
@@ -6624,7 +6702,7 @@
               <a:buNone/>
             </a:pPr>
             <a:r>
-              <a:rPr lang="en-US" sz="1800" b="1" dirty="0">
+              <a:rPr lang="en-US" sz="1600" b="1" dirty="0">
                 <a:solidFill>
                   <a:srgbClr val="6FD7B3"/>
                 </a:solidFill>
@@ -6634,20 +6712,20 @@
               </a:rPr>
               <a:t>POST /ask</a:t>
             </a:r>
-            <a:endParaRPr lang="en-US" sz="1800" dirty="0"/>
-          </a:p>
-        </p:txBody>
-      </p:sp>
-      <p:sp>
-        <p:nvSpPr>
-          <p:cNvPr id="9" name="Text 7"/>
-          <p:cNvSpPr/>
-          <p:nvPr/>
-        </p:nvSpPr>
-        <p:spPr>
-          <a:xfrm>
-            <a:off x="4023360" y="3749040"/>
-            <a:ext cx="7406640" cy="548640"/>
+            <a:endParaRPr lang="en-US" sz="1600" dirty="0"/>
+          </a:p>
+        </p:txBody>
+      </p:sp>
+      <p:sp>
+        <p:nvSpPr>
+          <p:cNvPr id="11" name="Text 9"/>
+          <p:cNvSpPr/>
+          <p:nvPr/>
+        </p:nvSpPr>
+        <p:spPr>
+          <a:xfrm>
+            <a:off x="3200400" y="4251960"/>
+            <a:ext cx="8229600" cy="365760"/>
           </a:xfrm>
           <a:prstGeom prst="rect">
             <a:avLst/>
@@ -6663,23 +6741,62 @@
               <a:buNone/>
             </a:pPr>
             <a:r>
-              <a:rPr lang="en-US" sz="1500" dirty="0">
-                <a:solidFill>
-                  <a:srgbClr val="C9D3D0"/>
+              <a:rPr lang="en-US" sz="1250" dirty="0">
+                <a:solidFill>
+                  <a:srgbClr val="E7E9EE"/>
+                </a:solidFill>
+                <a:latin typeface="Cascadia Code" pitchFamily="34" charset="0"/>
+                <a:ea typeface="Cascadia Code" pitchFamily="34" charset="-122"/>
+                <a:cs typeface="Cascadia Code" pitchFamily="34" charset="-120"/>
+              </a:rPr>
+              <a:t>שאלה: "What security incidents have been reported?"</a:t>
+            </a:r>
+            <a:endParaRPr lang="en-US" sz="1250" dirty="0"/>
+          </a:p>
+        </p:txBody>
+      </p:sp>
+      <p:sp>
+        <p:nvSpPr>
+          <p:cNvPr id="12" name="Text 10"/>
+          <p:cNvSpPr/>
+          <p:nvPr/>
+        </p:nvSpPr>
+        <p:spPr>
+          <a:xfrm>
+            <a:off x="731520" y="4636008"/>
+            <a:ext cx="10698480" cy="457200"/>
+          </a:xfrm>
+          <a:prstGeom prst="rect">
+            <a:avLst/>
+          </a:prstGeom>
+          <a:noFill/>
+          <a:ln/>
+        </p:spPr>
+        <p:txBody>
+          <a:bodyPr wrap="square" rtlCol="0" anchor="t"/>
+          <a:lstStyle/>
+          <a:p>
+            <a:pPr algn="r" indent="0" marL="0">
+              <a:buNone/>
+            </a:pPr>
+            <a:r>
+              <a:rPr lang="en-US" sz="1300" dirty="0">
+                <a:solidFill>
+                  <a:srgbClr val="9AA3B5"/>
                 </a:solidFill>
                 <a:latin typeface="Segoe UI" pitchFamily="34" charset="0"/>
                 <a:ea typeface="Segoe UI" pitchFamily="34" charset="-122"/>
                 <a:cs typeface="Segoe UI" pitchFamily="34" charset="-120"/>
               </a:rPr>
-              <a:t>שאלה בשפה טבעית, תשובה עם ציטוטים לכרטיסים אמיתיים</a:t>
-            </a:r>
-            <a:endParaRPr lang="en-US" sz="1500" dirty="0"/>
-          </a:p>
-        </p:txBody>
-      </p:sp>
-      <p:sp>
-        <p:nvSpPr>
-          <p:cNvPr id="10" name="Text 8"/>
+              <a:t>תשובה מורכבת מכרטיסים אמיתיים בלבד · כל ציטוט ניתן לבדיקה</a:t>
+            </a:r>
+            <a:endParaRPr lang="en-US" sz="1300" dirty="0"/>
+          </a:p>
+        </p:txBody>
+      </p:sp>
+      <p:sp>
+        <p:nvSpPr>
+          <p:cNvPr id="13" name="Text 11"/>
           <p:cNvSpPr/>
           <p:nvPr/>
         </p:nvSpPr>
@@ -6718,7 +6835,7 @@
       </p:sp>
       <p:sp>
         <p:nvSpPr>
-          <p:cNvPr id="11" name="Text 9"/>
+          <p:cNvPr id="14" name="Text 12"/>
           <p:cNvSpPr/>
           <p:nvPr/>
         </p:nvSpPr>
@@ -6874,11 +6991,326 @@
         <p:spPr>
           <a:xfrm>
             <a:off x="548640" y="1828800"/>
-            <a:ext cx="11064240" cy="1920240"/>
+            <a:ext cx="11064240" cy="2148840"/>
           </a:xfrm>
           <a:prstGeom prst="roundRect">
             <a:avLst>
-              <a:gd name="adj" fmla="val 3810"/>
+              <a:gd name="adj" fmla="val 3404"/>
+            </a:avLst>
+          </a:prstGeom>
+          <a:solidFill>
+            <a:srgbClr val="E3F1EC"/>
+          </a:solidFill>
+          <a:ln w="12700">
+            <a:solidFill>
+              <a:srgbClr val="E3F1EC"/>
+            </a:solidFill>
+            <a:prstDash val="solid"/>
+          </a:ln>
+        </p:spPr>
+      </p:sp>
+      <p:sp>
+        <p:nvSpPr>
+          <p:cNvPr id="5" name="Text 3"/>
+          <p:cNvSpPr/>
+          <p:nvPr/>
+        </p:nvSpPr>
+        <p:spPr>
+          <a:xfrm>
+            <a:off x="822960" y="2011680"/>
+            <a:ext cx="10515600" cy="457200"/>
+          </a:xfrm>
+          <a:prstGeom prst="rect">
+            <a:avLst/>
+          </a:prstGeom>
+          <a:noFill/>
+          <a:ln/>
+        </p:spPr>
+        <p:txBody>
+          <a:bodyPr wrap="square" rtlCol="0" anchor="ctr"/>
+          <a:lstStyle/>
+          <a:p>
+            <a:pPr algn="r" indent="0" marL="0">
+              <a:buNone/>
+            </a:pPr>
+            <a:r>
+              <a:rPr lang="en-US" sz="1700" b="1" dirty="0">
+                <a:solidFill>
+                  <a:srgbClr val="2B6F5C"/>
+                </a:solidFill>
+                <a:latin typeface="Segoe UI Semibold" pitchFamily="34" charset="0"/>
+                <a:ea typeface="Segoe UI Semibold" pitchFamily="34" charset="-122"/>
+                <a:cs typeface="Segoe UI Semibold" pitchFamily="34" charset="-120"/>
+              </a:rPr>
+              <a:t>הבדיקה הבין-לשונית הראשונית לא עבדה — ותוקנה ונמדדה מחדש</a:t>
+            </a:r>
+            <a:endParaRPr lang="en-US" sz="1700" dirty="0"/>
+          </a:p>
+        </p:txBody>
+      </p:sp>
+      <p:sp>
+        <p:nvSpPr>
+          <p:cNvPr id="6" name="Text 4"/>
+          <p:cNvSpPr/>
+          <p:nvPr/>
+        </p:nvSpPr>
+        <p:spPr>
+          <a:xfrm>
+            <a:off x="822960" y="2487168"/>
+            <a:ext cx="10515600" cy="868680"/>
+          </a:xfrm>
+          <a:prstGeom prst="rect">
+            <a:avLst/>
+          </a:prstGeom>
+          <a:noFill/>
+          <a:ln/>
+        </p:spPr>
+        <p:txBody>
+          <a:bodyPr wrap="square" rtlCol="0" anchor="t"/>
+          <a:lstStyle/>
+          <a:p>
+            <a:pPr algn="r" indent="0" marL="0">
+              <a:buNone/>
+            </a:pPr>
+            <a:r>
+              <a:rPr lang="en-US" sz="1300" dirty="0">
+                <a:solidFill>
+                  <a:srgbClr val="161A22"/>
+                </a:solidFill>
+                <a:latin typeface="Segoe UI" pitchFamily="34" charset="0"/>
+                <a:ea typeface="Segoe UI" pitchFamily="34" charset="-122"/>
+                <a:cs typeface="Segoe UI" pitchFamily="34" charset="-120"/>
+              </a:rPr>
+              <a:t>12,249 כרטיסים גרמניים "מציפים" כל שאילתה גרמנית לא-מוגבלת לפני שהיכולת הבין-לשונית מקבלת סיכוי — פגם בבדיקה, לא במודל. התיקון: הגבלת מאגר המועמדים לשפה השנייה לפני הדירוג, נמדד עם אותו מדד רלוונטיות בדיוק כמו הטבלה הראשית, על כל 28,587 הכרטיסים (250 שאילתות).</a:t>
+            </a:r>
+            <a:endParaRPr lang="en-US" sz="1300" dirty="0"/>
+          </a:p>
+        </p:txBody>
+      </p:sp>
+      <p:sp>
+        <p:nvSpPr>
+          <p:cNvPr id="7" name="Shape 5"/>
+          <p:cNvSpPr/>
+          <p:nvPr/>
+        </p:nvSpPr>
+        <p:spPr>
+          <a:xfrm>
+            <a:off x="822960" y="3429000"/>
+            <a:ext cx="2926080" cy="384048"/>
+          </a:xfrm>
+          <a:prstGeom prst="roundRect">
+            <a:avLst>
+              <a:gd name="adj" fmla="val 19048"/>
+            </a:avLst>
+          </a:prstGeom>
+          <a:solidFill>
+            <a:srgbClr val="FFFFFF"/>
+          </a:solidFill>
+          <a:ln w="12700">
+            <a:solidFill>
+              <a:srgbClr val="FFFFFF"/>
+            </a:solidFill>
+            <a:prstDash val="solid"/>
+          </a:ln>
+        </p:spPr>
+      </p:sp>
+      <p:sp>
+        <p:nvSpPr>
+          <p:cNvPr id="8" name="Text 6"/>
+          <p:cNvSpPr/>
+          <p:nvPr/>
+        </p:nvSpPr>
+        <p:spPr>
+          <a:xfrm>
+            <a:off x="822960" y="3429000"/>
+            <a:ext cx="2926080" cy="384048"/>
+          </a:xfrm>
+          <a:prstGeom prst="rect">
+            <a:avLst/>
+          </a:prstGeom>
+          <a:noFill/>
+          <a:ln/>
+        </p:spPr>
+        <p:txBody>
+          <a:bodyPr wrap="square" rtlCol="0" anchor="ctr"/>
+          <a:lstStyle/>
+          <a:p>
+            <a:pPr algn="ctr" indent="0" marL="0">
+              <a:buNone/>
+            </a:pPr>
+            <a:r>
+              <a:rPr lang="en-US" sz="1200" b="1" dirty="0">
+                <a:solidFill>
+                  <a:srgbClr val="5C6577"/>
+                </a:solidFill>
+                <a:latin typeface="Segoe UI" pitchFamily="34" charset="0"/>
+                <a:ea typeface="Segoe UI" pitchFamily="34" charset="-122"/>
+                <a:cs typeface="Segoe UI" pitchFamily="34" charset="-120"/>
+              </a:rPr>
+              <a:t>לפני (לא-מוגבל): ~0</a:t>
+            </a:r>
+            <a:endParaRPr lang="en-US" sz="1200" dirty="0"/>
+          </a:p>
+        </p:txBody>
+      </p:sp>
+      <p:sp>
+        <p:nvSpPr>
+          <p:cNvPr id="9" name="Text 7"/>
+          <p:cNvSpPr/>
+          <p:nvPr/>
+        </p:nvSpPr>
+        <p:spPr>
+          <a:xfrm>
+            <a:off x="3886200" y="3429000"/>
+            <a:ext cx="457200" cy="384048"/>
+          </a:xfrm>
+          <a:prstGeom prst="rect">
+            <a:avLst/>
+          </a:prstGeom>
+          <a:noFill/>
+          <a:ln/>
+        </p:spPr>
+        <p:txBody>
+          <a:bodyPr wrap="square" rtlCol="0" anchor="ctr"/>
+          <a:lstStyle/>
+          <a:p>
+            <a:pPr algn="ctr" indent="0" marL="0">
+              <a:buNone/>
+            </a:pPr>
+            <a:r>
+              <a:rPr lang="en-US" sz="1800" b="1" dirty="0">
+                <a:solidFill>
+                  <a:srgbClr val="2B6F5C"/>
+                </a:solidFill>
+                <a:latin typeface="Segoe UI" pitchFamily="34" charset="0"/>
+                <a:ea typeface="Segoe UI" pitchFamily="34" charset="-122"/>
+                <a:cs typeface="Segoe UI" pitchFamily="34" charset="-120"/>
+              </a:rPr>
+              <a:t>→</a:t>
+            </a:r>
+            <a:endParaRPr lang="en-US" sz="1800" dirty="0"/>
+          </a:p>
+        </p:txBody>
+      </p:sp>
+      <p:sp>
+        <p:nvSpPr>
+          <p:cNvPr id="10" name="Shape 8"/>
+          <p:cNvSpPr/>
+          <p:nvPr/>
+        </p:nvSpPr>
+        <p:spPr>
+          <a:xfrm>
+            <a:off x="4434840" y="3429000"/>
+            <a:ext cx="3657600" cy="384048"/>
+          </a:xfrm>
+          <a:prstGeom prst="roundRect">
+            <a:avLst>
+              <a:gd name="adj" fmla="val 19048"/>
+            </a:avLst>
+          </a:prstGeom>
+          <a:solidFill>
+            <a:srgbClr val="FFFFFF"/>
+          </a:solidFill>
+          <a:ln w="12700">
+            <a:solidFill>
+              <a:srgbClr val="FFFFFF"/>
+            </a:solidFill>
+            <a:prstDash val="solid"/>
+          </a:ln>
+        </p:spPr>
+      </p:sp>
+      <p:sp>
+        <p:nvSpPr>
+          <p:cNvPr id="11" name="Text 9"/>
+          <p:cNvSpPr/>
+          <p:nvPr/>
+        </p:nvSpPr>
+        <p:spPr>
+          <a:xfrm>
+            <a:off x="4434840" y="3429000"/>
+            <a:ext cx="3657600" cy="384048"/>
+          </a:xfrm>
+          <a:prstGeom prst="rect">
+            <a:avLst/>
+          </a:prstGeom>
+          <a:noFill/>
+          <a:ln/>
+        </p:spPr>
+        <p:txBody>
+          <a:bodyPr wrap="square" rtlCol="0" anchor="ctr"/>
+          <a:lstStyle/>
+          <a:p>
+            <a:pPr algn="ctr" indent="0" marL="0">
+              <a:buNone/>
+            </a:pPr>
+            <a:r>
+              <a:rPr lang="en-US" sz="1200" b="1" dirty="0">
+                <a:solidFill>
+                  <a:srgbClr val="2B6F5C"/>
+                </a:solidFill>
+                <a:latin typeface="Segoe UI" pitchFamily="34" charset="0"/>
+                <a:ea typeface="Segoe UI" pitchFamily="34" charset="-122"/>
+                <a:cs typeface="Segoe UI" pitchFamily="34" charset="-120"/>
+              </a:rPr>
+              <a:t>אחרי (מסונן, סמנטי): 0.685 P@5</a:t>
+            </a:r>
+            <a:endParaRPr lang="en-US" sz="1200" dirty="0"/>
+          </a:p>
+        </p:txBody>
+      </p:sp>
+      <p:sp>
+        <p:nvSpPr>
+          <p:cNvPr id="12" name="Text 10"/>
+          <p:cNvSpPr/>
+          <p:nvPr/>
+        </p:nvSpPr>
+        <p:spPr>
+          <a:xfrm>
+            <a:off x="822960" y="3886200"/>
+            <a:ext cx="10515600" cy="365760"/>
+          </a:xfrm>
+          <a:prstGeom prst="rect">
+            <a:avLst/>
+          </a:prstGeom>
+          <a:noFill/>
+          <a:ln/>
+        </p:spPr>
+        <p:txBody>
+          <a:bodyPr wrap="square" rtlCol="0" anchor="ctr"/>
+          <a:lstStyle/>
+          <a:p>
+            <a:pPr algn="r" indent="0" marL="0">
+              <a:buNone/>
+            </a:pPr>
+            <a:r>
+              <a:rPr lang="en-US" sz="1150" i="1" dirty="0">
+                <a:solidFill>
+                  <a:srgbClr val="5C6577"/>
+                </a:solidFill>
+                <a:latin typeface="Segoe UI" pitchFamily="34" charset="0"/>
+                <a:ea typeface="Segoe UI" pitchFamily="34" charset="-122"/>
+                <a:cs typeface="Segoe UI" pitchFamily="34" charset="-120"/>
+              </a:rPr>
+              <a:t>מול מילולי (BM25) באותה בדיקה: 0.660 — פער של 2.5 נקודות, רחב יותר מהפער בשליפה הרגילה (1.6 נק')</a:t>
+            </a:r>
+            <a:endParaRPr lang="en-US" sz="1150" dirty="0"/>
+          </a:p>
+        </p:txBody>
+      </p:sp>
+      <p:sp>
+        <p:nvSpPr>
+          <p:cNvPr id="13" name="Shape 11"/>
+          <p:cNvSpPr/>
+          <p:nvPr/>
+        </p:nvSpPr>
+        <p:spPr>
+          <a:xfrm>
+            <a:off x="548640" y="4160520"/>
+            <a:ext cx="11064240" cy="1600200"/>
+          </a:xfrm>
+          <a:prstGeom prst="roundRect">
+            <a:avLst>
+              <a:gd name="adj" fmla="val 4571"/>
             </a:avLst>
           </a:prstGeom>
           <a:solidFill>
@@ -6894,13 +7326,13 @@
       </p:sp>
       <p:sp>
         <p:nvSpPr>
-          <p:cNvPr id="5" name="Text 3"/>
-          <p:cNvSpPr/>
-          <p:nvPr/>
-        </p:nvSpPr>
-        <p:spPr>
-          <a:xfrm>
-            <a:off x="822960" y="2011680"/>
+          <p:cNvPr id="14" name="Text 12"/>
+          <p:cNvSpPr/>
+          <p:nvPr/>
+        </p:nvSpPr>
+        <p:spPr>
+          <a:xfrm>
+            <a:off x="822960" y="4343400"/>
             <a:ext cx="10515600" cy="457200"/>
           </a:xfrm>
           <a:prstGeom prst="rect">
@@ -6925,7 +7357,7 @@
                 <a:ea typeface="Segoe UI Semibold" pitchFamily="34" charset="-122"/>
                 <a:cs typeface="Segoe UI Semibold" pitchFamily="34" charset="-120"/>
               </a:rPr>
-              <a:t>הבדיקה הבין-לשונית לא עבדה</a:t>
+              <a:t>מדד הרלוונטיות הוא החוליה החלשה — עדיין פתוח</a:t>
             </a:r>
             <a:endParaRPr lang="en-US" sz="1700" dirty="0"/>
           </a:p>
@@ -6933,14 +7365,14 @@
       </p:sp>
       <p:sp>
         <p:nvSpPr>
-          <p:cNvPr id="6" name="Text 4"/>
-          <p:cNvSpPr/>
-          <p:nvPr/>
-        </p:nvSpPr>
-        <p:spPr>
-          <a:xfrm>
-            <a:off x="822960" y="2514600"/>
-            <a:ext cx="10515600" cy="1097280"/>
+          <p:cNvPr id="15" name="Text 13"/>
+          <p:cNvSpPr/>
+          <p:nvPr/>
+        </p:nvSpPr>
+        <p:spPr>
+          <a:xfrm>
+            <a:off x="822960" y="4828032"/>
+            <a:ext cx="10515600" cy="822960"/>
           </a:xfrm>
           <a:prstGeom prst="rect">
             <a:avLst/>
@@ -6964,7 +7396,7 @@
                 <a:ea typeface="Segoe UI" pitchFamily="34" charset="-122"/>
                 <a:cs typeface="Segoe UI" pitchFamily="34" charset="-120"/>
               </a:rPr>
-              <a:t>12,249 כרטיסים גרמניים "מציפים" כל שאילתה גרמנית לפני שהיכולת הבין-לשונית מקבלת סיכוי. פגם בבדיקה, לא במודל — התיקון (סינון לפי שפה) כבר קיים ב-API.</a:t>
+              <a:t>תגיות משותפות מתגמלות דמיון נושאי, אבל יכולות להעניש-חסר פתרון שמנוסח אחרת מהבעיה. הערכה אנושית על מדגם שאילתות הייתה התיקון הכן.</a:t>
             </a:r>
             <a:endParaRPr lang="en-US" sz="1400" dirty="0"/>
           </a:p>
@@ -6972,142 +7404,37 @@
       </p:sp>
       <p:sp>
         <p:nvSpPr>
-          <p:cNvPr id="7" name="Shape 5"/>
-          <p:cNvSpPr/>
-          <p:nvPr/>
-        </p:nvSpPr>
-        <p:spPr>
-          <a:xfrm>
-            <a:off x="548640" y="4023360"/>
-            <a:ext cx="11064240" cy="1920240"/>
-          </a:xfrm>
-          <a:prstGeom prst="roundRect">
-            <a:avLst>
-              <a:gd name="adj" fmla="val 3810"/>
-            </a:avLst>
-          </a:prstGeom>
-          <a:solidFill>
-            <a:srgbClr val="F6ECD9"/>
-          </a:solidFill>
-          <a:ln w="12700">
-            <a:solidFill>
-              <a:srgbClr val="F6ECD9"/>
-            </a:solidFill>
-            <a:prstDash val="solid"/>
-          </a:ln>
-        </p:spPr>
-      </p:sp>
-      <p:sp>
-        <p:nvSpPr>
-          <p:cNvPr id="8" name="Text 6"/>
-          <p:cNvSpPr/>
-          <p:nvPr/>
-        </p:nvSpPr>
-        <p:spPr>
-          <a:xfrm>
-            <a:off x="822960" y="4206240"/>
-            <a:ext cx="10515600" cy="457200"/>
-          </a:xfrm>
-          <a:prstGeom prst="rect">
-            <a:avLst/>
-          </a:prstGeom>
-          <a:noFill/>
-          <a:ln/>
-        </p:spPr>
-        <p:txBody>
-          <a:bodyPr wrap="square" rtlCol="0" anchor="ctr"/>
-          <a:lstStyle/>
-          <a:p>
-            <a:pPr algn="r" indent="0" marL="0">
-              <a:buNone/>
-            </a:pPr>
-            <a:r>
-              <a:rPr lang="en-US" sz="1700" b="1" dirty="0">
-                <a:solidFill>
-                  <a:srgbClr val="9C6A12"/>
-                </a:solidFill>
-                <a:latin typeface="Segoe UI Semibold" pitchFamily="34" charset="0"/>
-                <a:ea typeface="Segoe UI Semibold" pitchFamily="34" charset="-122"/>
-                <a:cs typeface="Segoe UI Semibold" pitchFamily="34" charset="-120"/>
-              </a:rPr>
-              <a:t>מדד הרלוונטיות הוא החוליה החלשה</a:t>
-            </a:r>
-            <a:endParaRPr lang="en-US" sz="1700" dirty="0"/>
-          </a:p>
-        </p:txBody>
-      </p:sp>
-      <p:sp>
-        <p:nvSpPr>
-          <p:cNvPr id="9" name="Text 7"/>
-          <p:cNvSpPr/>
-          <p:nvPr/>
-        </p:nvSpPr>
-        <p:spPr>
-          <a:xfrm>
-            <a:off x="822960" y="4709160"/>
-            <a:ext cx="10515600" cy="1097280"/>
-          </a:xfrm>
-          <a:prstGeom prst="rect">
-            <a:avLst/>
-          </a:prstGeom>
-          <a:noFill/>
-          <a:ln/>
-        </p:spPr>
-        <p:txBody>
-          <a:bodyPr wrap="square" rtlCol="0" anchor="t"/>
-          <a:lstStyle/>
-          <a:p>
-            <a:pPr algn="r" indent="0" marL="0">
-              <a:buNone/>
-            </a:pPr>
-            <a:r>
-              <a:rPr lang="en-US" sz="1400" dirty="0">
-                <a:solidFill>
-                  <a:srgbClr val="161A22"/>
+          <p:cNvPr id="16" name="Text 14"/>
+          <p:cNvSpPr/>
+          <p:nvPr/>
+        </p:nvSpPr>
+        <p:spPr>
+          <a:xfrm>
+            <a:off x="457200" y="6510528"/>
+            <a:ext cx="5486400" cy="274320"/>
+          </a:xfrm>
+          <a:prstGeom prst="rect">
+            <a:avLst/>
+          </a:prstGeom>
+          <a:noFill/>
+          <a:ln/>
+        </p:spPr>
+        <p:txBody>
+          <a:bodyPr wrap="square" rtlCol="0" anchor="ctr"/>
+          <a:lstStyle/>
+          <a:p>
+            <a:pPr algn="l" indent="0" marL="0">
+              <a:buNone/>
+            </a:pPr>
+            <a:r>
+              <a:rPr lang="en-US" sz="900" dirty="0">
+                <a:solidFill>
+                  <a:srgbClr val="5C6577"/>
                 </a:solidFill>
                 <a:latin typeface="Segoe UI" pitchFamily="34" charset="0"/>
                 <a:ea typeface="Segoe UI" pitchFamily="34" charset="-122"/>
                 <a:cs typeface="Segoe UI" pitchFamily="34" charset="-120"/>
               </a:rPr>
-              <a:t>תגיות משותפות מתגמלות דמיון נושאי, אבל יכולות להעניש-חסר פתרון שמנוסח אחרת מהבעיה. הערכה אנושית הייתה התיקון הכן.</a:t>
-            </a:r>
-            <a:endParaRPr lang="en-US" sz="1400" dirty="0"/>
-          </a:p>
-        </p:txBody>
-      </p:sp>
-      <p:sp>
-        <p:nvSpPr>
-          <p:cNvPr id="10" name="Text 8"/>
-          <p:cNvSpPr/>
-          <p:nvPr/>
-        </p:nvSpPr>
-        <p:spPr>
-          <a:xfrm>
-            <a:off x="457200" y="6510528"/>
-            <a:ext cx="5486400" cy="274320"/>
-          </a:xfrm>
-          <a:prstGeom prst="rect">
-            <a:avLst/>
-          </a:prstGeom>
-          <a:noFill/>
-          <a:ln/>
-        </p:spPr>
-        <p:txBody>
-          <a:bodyPr wrap="square" rtlCol="0" anchor="ctr"/>
-          <a:lstStyle/>
-          <a:p>
-            <a:pPr algn="l" indent="0" marL="0">
-              <a:buNone/>
-            </a:pPr>
-            <a:r>
-              <a:rPr lang="en-US" sz="900" dirty="0">
-                <a:solidFill>
-                  <a:srgbClr val="5C6577"/>
-                </a:solidFill>
-                <a:latin typeface="Segoe UI" pitchFamily="34" charset="0"/>
-                <a:ea typeface="Segoe UI" pitchFamily="34" charset="-122"/>
-                <a:cs typeface="Segoe UI" pitchFamily="34" charset="-120"/>
-              </a:rPr>
               <a:t>Ticket Intelligence · BIU 8688697201</a:t>
             </a:r>
             <a:endParaRPr lang="en-US" sz="900" dirty="0"/>
@@ -7116,7 +7443,7 @@
       </p:sp>
       <p:sp>
         <p:nvSpPr>
-          <p:cNvPr id="11" name="Text 9"/>
+          <p:cNvPr id="17" name="Text 15"/>
           <p:cNvSpPr/>
           <p:nvPr/>
         </p:nvSpPr>

--- a/docs/presentation_he/מצגת.pptx
+++ b/docs/presentation_he/מצגת.pptx
@@ -4443,7 +4443,7 @@
                 <a:ea typeface="Segoe UI Semibold" pitchFamily="34" charset="-122"/>
                 <a:cs typeface="Segoe UI Semibold" pitchFamily="34" charset="-120"/>
               </a:rPr>
-              <a:t>יכולת ה-AI — ארבע יכולות</a:t>
+              <a:t>יכולת ה-AI — שלוש יכולות</a:t>
             </a:r>
             <a:endParaRPr lang="en-US" sz="3000" dirty="0"/>
           </a:p>
@@ -4793,7 +4793,7 @@
       </p:sp>
       <p:sp>
         <p:nvSpPr>
-          <p:cNvPr id="14" name="Shape 12"/>
+          <p:cNvPr id="19" name="Shape 17"/>
           <p:cNvSpPr/>
           <p:nvPr/>
         </p:nvSpPr>
@@ -4820,7 +4820,7 @@
       </p:sp>
       <p:sp>
         <p:nvSpPr>
-          <p:cNvPr id="15" name="Shape 13"/>
+          <p:cNvPr id="20" name="Shape 18"/>
           <p:cNvSpPr/>
           <p:nvPr/>
         </p:nvSpPr>
@@ -4847,7 +4847,7 @@
       </p:sp>
       <p:sp>
         <p:nvSpPr>
-          <p:cNvPr id="16" name="Text 14"/>
+          <p:cNvPr id="21" name="Text 19"/>
           <p:cNvSpPr/>
           <p:nvPr/>
         </p:nvSpPr>
@@ -4878,7 +4878,7 @@
                 <a:ea typeface="Segoe UI" pitchFamily="34" charset="-122"/>
                 <a:cs typeface="Segoe UI" pitchFamily="34" charset="-120"/>
               </a:rPr>
-              <a:t>a</a:t>
+              <a:t>f</a:t>
             </a:r>
             <a:endParaRPr lang="en-US" sz="1200" dirty="0"/>
           </a:p>
@@ -4886,7 +4886,7 @@
       </p:sp>
       <p:sp>
         <p:nvSpPr>
-          <p:cNvPr id="17" name="Text 15"/>
+          <p:cNvPr id="22" name="Text 20"/>
           <p:cNvSpPr/>
           <p:nvPr/>
         </p:nvSpPr>
@@ -4917,7 +4917,7 @@
                 <a:ea typeface="Segoe UI Semibold" pitchFamily="34" charset="-122"/>
                 <a:cs typeface="Segoe UI Semibold" pitchFamily="34" charset="-120"/>
               </a:rPr>
-              <a:t>העשרת LLM</a:t>
+              <a:t>ניתוב — למידת מכונה</a:t>
             </a:r>
             <a:endParaRPr lang="en-US" sz="1600" dirty="0"/>
           </a:p>
@@ -4925,184 +4925,13 @@
       </p:sp>
       <p:sp>
         <p:nvSpPr>
-          <p:cNvPr id="18" name="Text 16"/>
+          <p:cNvPr id="23" name="Text 21"/>
           <p:cNvSpPr/>
           <p:nvPr/>
         </p:nvSpPr>
         <p:spPr>
           <a:xfrm>
             <a:off x="777240" y="4800600"/>
-            <a:ext cx="4937760" cy="594360"/>
-          </a:xfrm>
-          <a:prstGeom prst="rect">
-            <a:avLst/>
-          </a:prstGeom>
-          <a:noFill/>
-          <a:ln/>
-        </p:spPr>
-        <p:txBody>
-          <a:bodyPr wrap="square" rtlCol="0" anchor="ctr"/>
-          <a:lstStyle/>
-          <a:p>
-            <a:pPr algn="r" indent="0" marL="0">
-              <a:buNone/>
-            </a:pPr>
-            <a:r>
-              <a:rPr lang="en-US" sz="1250" dirty="0">
-                <a:solidFill>
-                  <a:srgbClr val="5C6577"/>
-                </a:solidFill>
-                <a:latin typeface="Segoe UI" pitchFamily="34" charset="0"/>
-                <a:ea typeface="Segoe UI" pitchFamily="34" charset="-122"/>
-                <a:cs typeface="Segoe UI" pitchFamily="34" charset="-120"/>
-              </a:rPr>
-              <a:t>סיווג, חילוץ ישויות וסיכום — מאומת מול אוצר המילים הידוע לפני שנכנס לאינדקס.</a:t>
-            </a:r>
-            <a:endParaRPr lang="en-US" sz="1250" dirty="0"/>
-          </a:p>
-        </p:txBody>
-      </p:sp>
-      <p:sp>
-        <p:nvSpPr>
-          <p:cNvPr id="19" name="Shape 17"/>
-          <p:cNvSpPr/>
-          <p:nvPr/>
-        </p:nvSpPr>
-        <p:spPr>
-          <a:xfrm>
-            <a:off x="6217920" y="3749040"/>
-            <a:ext cx="5394960" cy="1691640"/>
-          </a:xfrm>
-          <a:prstGeom prst="roundRect">
-            <a:avLst>
-              <a:gd name="adj" fmla="val 4324"/>
-            </a:avLst>
-          </a:prstGeom>
-          <a:solidFill>
-            <a:srgbClr val="FFFFFF"/>
-          </a:solidFill>
-          <a:ln w="12700">
-            <a:solidFill>
-              <a:srgbClr val="E1E4EA"/>
-            </a:solidFill>
-            <a:prstDash val="solid"/>
-          </a:ln>
-        </p:spPr>
-      </p:sp>
-      <p:sp>
-        <p:nvSpPr>
-          <p:cNvPr id="20" name="Shape 18"/>
-          <p:cNvSpPr/>
-          <p:nvPr/>
-        </p:nvSpPr>
-        <p:spPr>
-          <a:xfrm>
-            <a:off x="6446520" y="3950208"/>
-            <a:ext cx="1463040" cy="384048"/>
-          </a:xfrm>
-          <a:prstGeom prst="roundRect">
-            <a:avLst>
-              <a:gd name="adj" fmla="val 19048"/>
-            </a:avLst>
-          </a:prstGeom>
-          <a:solidFill>
-            <a:srgbClr val="E3F1EC"/>
-          </a:solidFill>
-          <a:ln w="12700">
-            <a:solidFill>
-              <a:srgbClr val="E3F1EC"/>
-            </a:solidFill>
-            <a:prstDash val="solid"/>
-          </a:ln>
-        </p:spPr>
-      </p:sp>
-      <p:sp>
-        <p:nvSpPr>
-          <p:cNvPr id="21" name="Text 19"/>
-          <p:cNvSpPr/>
-          <p:nvPr/>
-        </p:nvSpPr>
-        <p:spPr>
-          <a:xfrm>
-            <a:off x="6446520" y="3950208"/>
-            <a:ext cx="1463040" cy="384048"/>
-          </a:xfrm>
-          <a:prstGeom prst="rect">
-            <a:avLst/>
-          </a:prstGeom>
-          <a:noFill/>
-          <a:ln/>
-        </p:spPr>
-        <p:txBody>
-          <a:bodyPr wrap="square" rtlCol="0" anchor="ctr"/>
-          <a:lstStyle/>
-          <a:p>
-            <a:pPr algn="ctr" indent="0" marL="0">
-              <a:buNone/>
-            </a:pPr>
-            <a:r>
-              <a:rPr lang="en-US" sz="1200" b="1" dirty="0">
-                <a:solidFill>
-                  <a:srgbClr val="2B6F5C"/>
-                </a:solidFill>
-                <a:latin typeface="Segoe UI" pitchFamily="34" charset="0"/>
-                <a:ea typeface="Segoe UI" pitchFamily="34" charset="-122"/>
-                <a:cs typeface="Segoe UI" pitchFamily="34" charset="-120"/>
-              </a:rPr>
-              <a:t>f</a:t>
-            </a:r>
-            <a:endParaRPr lang="en-US" sz="1200" dirty="0"/>
-          </a:p>
-        </p:txBody>
-      </p:sp>
-      <p:sp>
-        <p:nvSpPr>
-          <p:cNvPr id="22" name="Text 20"/>
-          <p:cNvSpPr/>
-          <p:nvPr/>
-        </p:nvSpPr>
-        <p:spPr>
-          <a:xfrm>
-            <a:off x="6446520" y="4434840"/>
-            <a:ext cx="4937760" cy="365760"/>
-          </a:xfrm>
-          <a:prstGeom prst="rect">
-            <a:avLst/>
-          </a:prstGeom>
-          <a:noFill/>
-          <a:ln/>
-        </p:spPr>
-        <p:txBody>
-          <a:bodyPr wrap="square" rtlCol="0" anchor="ctr"/>
-          <a:lstStyle/>
-          <a:p>
-            <a:pPr algn="r" indent="0" marL="0">
-              <a:buNone/>
-            </a:pPr>
-            <a:r>
-              <a:rPr lang="en-US" sz="1600" b="1" dirty="0">
-                <a:solidFill>
-                  <a:srgbClr val="161A22"/>
-                </a:solidFill>
-                <a:latin typeface="Segoe UI Semibold" pitchFamily="34" charset="0"/>
-                <a:ea typeface="Segoe UI Semibold" pitchFamily="34" charset="-122"/>
-                <a:cs typeface="Segoe UI Semibold" pitchFamily="34" charset="-120"/>
-              </a:rPr>
-              <a:t>ניתוב — למידת מכונה</a:t>
-            </a:r>
-            <a:endParaRPr lang="en-US" sz="1600" dirty="0"/>
-          </a:p>
-        </p:txBody>
-      </p:sp>
-      <p:sp>
-        <p:nvSpPr>
-          <p:cNvPr id="23" name="Text 21"/>
-          <p:cNvSpPr/>
-          <p:nvPr/>
-        </p:nvSpPr>
-        <p:spPr>
-          <a:xfrm>
-            <a:off x="6446520" y="4800600"/>
             <a:ext cx="4937760" cy="594360"/>
           </a:xfrm>
           <a:prstGeom prst="rect">

--- a/docs/presentation_he/מצגת.pptx
+++ b/docs/presentation_he/מצגת.pptx
@@ -2697,7 +2697,7 @@
                 <a:ea typeface="Segoe UI" pitchFamily="34" charset="-122"/>
                 <a:cs typeface="Segoe UI" pitchFamily="34" charset="-120"/>
               </a:rPr>
-              <a:t>שם 1  ·  שם 2  ·  שם 3</a:t>
+              <a:t>יעל כהן  ·  איתי נורי  ·  יהל מנחם</a:t>
             </a:r>
             <a:endParaRPr lang="en-US" sz="1500" dirty="0"/>
           </a:p>
